--- a/samples/animations/behavior-scale.pptx
+++ b/samples/animations/behavior-scale.pptx
@@ -2033,7 +2033,21 @@
                                   <p:childTnLst>
                                     <p:animScale>
                                       <p:cBhvr>
-                                        <p:cTn id="6" dur="450" accel="20000" decel="60000" fill="hold"/>
+                                        <p:cTn id="6" dur="270" accel="20000" decel="60000" fill="hold"/>
+                                        <p:tgtEl>
+                                          <p:spTgt spid="4"/>
+                                        </p:tgtEl>
+                                      </p:cBhvr>
+                                      <p:from x="100000" y="100000"/>
+                                      <p:to x="85000" y="85000"/>
+                                    </p:animScale>
+                                    <p:animScale>
+                                      <p:cBhvr>
+                                        <p:cTn id="7" dur="360" accel="20000" decel="60000" fill="hold">
+                                          <p:stCondLst>
+                                            <p:cond delay="270"/>
+                                          </p:stCondLst>
+                                        </p:cTn>
                                         <p:tgtEl>
                                           <p:spTgt spid="4"/>
                                         </p:tgtEl>
@@ -2043,9 +2057,9 @@
                                     </p:animScale>
                                     <p:animScale>
                                       <p:cBhvr>
-                                        <p:cTn id="7" dur="450" accel="20000" decel="60000" fill="remove">
+                                        <p:cTn id="8" dur="270" accel="20000" decel="60000" fill="remove">
                                           <p:stCondLst>
-                                            <p:cond delay="450"/>
+                                            <p:cond delay="630"/>
                                           </p:stCondLst>
                                         </p:cTn>
                                         <p:tgtEl>
@@ -3567,7 +3581,21 @@
                                   <p:childTnLst>
                                     <p:animScale>
                                       <p:cBhvr>
-                                        <p:cTn id="6" dur="450" accel="20000" decel="60000" fill="hold"/>
+                                        <p:cTn id="6" dur="270" accel="20000" decel="60000" fill="hold"/>
+                                        <p:tgtEl>
+                                          <p:spTgt spid="4"/>
+                                        </p:tgtEl>
+                                      </p:cBhvr>
+                                      <p:from x="100000" y="100000"/>
+                                      <p:to x="95000" y="95000"/>
+                                    </p:animScale>
+                                    <p:animScale>
+                                      <p:cBhvr>
+                                        <p:cTn id="7" dur="360" accel="20000" decel="60000" fill="hold">
+                                          <p:stCondLst>
+                                            <p:cond delay="270"/>
+                                          </p:stCondLst>
+                                        </p:cTn>
                                         <p:tgtEl>
                                           <p:spTgt spid="4"/>
                                         </p:tgtEl>
@@ -3577,9 +3605,9 @@
                                     </p:animScale>
                                     <p:animScale>
                                       <p:cBhvr>
-                                        <p:cTn id="7" dur="450" accel="20000" decel="60000" fill="remove">
+                                        <p:cTn id="8" dur="270" accel="20000" decel="60000" fill="remove">
                                           <p:stCondLst>
-                                            <p:cond delay="450"/>
+                                            <p:cond delay="630"/>
                                           </p:stCondLst>
                                         </p:cTn>
                                         <p:tgtEl>
@@ -3781,7 +3809,21 @@
                                   <p:childTnLst>
                                     <p:animScale>
                                       <p:cBhvr>
-                                        <p:cTn id="6" dur="450" accel="20000" decel="60000" fill="hold"/>
+                                        <p:cTn id="6" dur="270" accel="20000" decel="60000" fill="hold"/>
+                                        <p:tgtEl>
+                                          <p:spTgt spid="4"/>
+                                        </p:tgtEl>
+                                      </p:cBhvr>
+                                      <p:from x="100000" y="100000"/>
+                                      <p:to x="90000" y="90000"/>
+                                    </p:animScale>
+                                    <p:animScale>
+                                      <p:cBhvr>
+                                        <p:cTn id="7" dur="360" accel="20000" decel="60000" fill="hold">
+                                          <p:stCondLst>
+                                            <p:cond delay="270"/>
+                                          </p:stCondLst>
+                                        </p:cTn>
                                         <p:tgtEl>
                                           <p:spTgt spid="4"/>
                                         </p:tgtEl>
@@ -3791,9 +3833,9 @@
                                     </p:animScale>
                                     <p:animScale>
                                       <p:cBhvr>
-                                        <p:cTn id="7" dur="450" accel="20000" decel="60000" fill="remove">
+                                        <p:cTn id="8" dur="270" accel="20000" decel="60000" fill="remove">
                                           <p:stCondLst>
-                                            <p:cond delay="450"/>
+                                            <p:cond delay="630"/>
                                           </p:stCondLst>
                                         </p:cTn>
                                         <p:tgtEl>
